--- a/courses/build/farmer-money/R-D3.zu.pptx
+++ b/courses/build/farmer-money/R-D3.zu.pptx
@@ -1347,7 +1347,7 @@
           </a:p>
           <a:p>
             <a:r>
-              <a:t>Clip R-ANI-08: public/course-animations/market-community/watch-09-surplus-routes.mp4</a:t>
+              <a:t>Clip R-ANI-08: public/course-media/farmer-money/R-ANI-08.mp4</a:t>
             </a:r>
           </a:p>
         </p:txBody>
@@ -1649,7 +1649,7 @@
           </a:p>
           <a:p>
             <a:r>
-              <a:t>Clip R-ANI-09: public/course-animations/market-community/watch-14-community-network.mp4</a:t>
+              <a:t>Clip R-ANI-09: public/course-media/farmer-money/R-ANI-09.mp4</a:t>
             </a:r>
           </a:p>
         </p:txBody>
